--- a/Slides/Module 11.1 Interaction-Level Design.pptx
+++ b/Slides/Module 11.1 Interaction-Level Design.pptx
@@ -4261,7 +4261,15 @@
             </a:r>
             <a:r>
               <a:rPr lang="en-US" dirty="0"/>
-              <a:t>' at each tick of the clock.</a:t>
+              <a:t>' at each tick of the clock.   You may find this representation familiar from the OOD/Java world, but in the </a:t>
+            </a:r>
+            <a:r>
+              <a:rPr lang="en-US" dirty="0" err="1"/>
+              <a:t>WebAPI</a:t>
+            </a:r>
+            <a:r>
+              <a:rPr lang="en-US" dirty="0"/>
+              <a:t> world, the callback implementation is much more common.</a:t>
             </a:r>
           </a:p>
         </p:txBody>
@@ -13192,11 +13200,14 @@
           <a:lstStyle/>
           <a:p>
             <a:pPr algn="l"/>
-            <a:endParaRPr lang="en-US" dirty="0">
-              <a:solidFill>
-                <a:schemeClr val="tx1"/>
-              </a:solidFill>
-            </a:endParaRPr>
+            <a:r>
+              <a:rPr lang="en-US" dirty="0">
+                <a:solidFill>
+                  <a:schemeClr val="tx1"/>
+                </a:solidFill>
+              </a:rPr>
+              <a:t>"delegate" or "callback"</a:t>
+            </a:r>
           </a:p>
         </p:txBody>
       </p:sp>
@@ -18280,7 +18291,7 @@
           <a:p>
             <a:r>
               <a:rPr lang="en-US" dirty="0"/>
-              <a:t>This is called the Listener or Observer Pattern</a:t>
+              <a:t>This these are all instances of the Listener or Observer Pattern</a:t>
             </a:r>
           </a:p>
         </p:txBody>

--- a/Slides/Module 11.1 Interaction-Level Design.pptx
+++ b/Slides/Module 11.1 Interaction-Level Design.pptx
@@ -3283,7 +3283,7 @@
           <a:p>
             <a:fld id="{7C7E5181-6CF5-45F7-A87A-E0E0B1FD7549}" type="datetimeFigureOut">
               <a:rPr lang="en-US" smtClean="0"/>
-              <a:t>2/9/2026</a:t>
+              <a:t>2/11/2026</a:t>
             </a:fld>
             <a:endParaRPr lang="en-US"/>
           </a:p>
@@ -6758,7 +6758,7 @@
           <a:p>
             <a:fld id="{5D2A64DE-480B-420F-9649-4F8E696E08E0}" type="datetime1">
               <a:rPr lang="en-US" smtClean="0"/>
-              <a:t>2/9/2026</a:t>
+              <a:t>2/11/2026</a:t>
             </a:fld>
             <a:endParaRPr lang="en-US"/>
           </a:p>
@@ -7082,7 +7082,7 @@
           <a:p>
             <a:fld id="{EA476A42-A091-4468-A075-64A31BE59948}" type="datetime1">
               <a:rPr lang="en-US" smtClean="0"/>
-              <a:t>2/9/2026</a:t>
+              <a:t>2/11/2026</a:t>
             </a:fld>
             <a:endParaRPr lang="en-US"/>
           </a:p>
@@ -7280,7 +7280,7 @@
           <a:p>
             <a:fld id="{0D3616D0-8311-4107-9726-6B805E7D05BA}" type="datetime1">
               <a:rPr lang="en-US" smtClean="0"/>
-              <a:t>2/9/2026</a:t>
+              <a:t>2/11/2026</a:t>
             </a:fld>
             <a:endParaRPr lang="en-US"/>
           </a:p>
@@ -7488,7 +7488,7 @@
           <a:p>
             <a:fld id="{3BC2557A-5C88-417A-A763-5AC779462A5F}" type="datetime1">
               <a:rPr lang="en-US" smtClean="0"/>
-              <a:t>2/9/2026</a:t>
+              <a:t>2/11/2026</a:t>
             </a:fld>
             <a:endParaRPr lang="en-US"/>
           </a:p>
@@ -8012,7 +8012,7 @@
           <a:p>
             <a:fld id="{07C7BFD4-467E-4EDE-93EA-052F5B39A4E5}" type="datetime1">
               <a:rPr lang="en-US" smtClean="0"/>
-              <a:t>2/9/2026</a:t>
+              <a:t>2/11/2026</a:t>
             </a:fld>
             <a:endParaRPr lang="en-US"/>
           </a:p>
@@ -8262,7 +8262,7 @@
           <a:p>
             <a:fld id="{07C7BFD4-467E-4EDE-93EA-052F5B39A4E5}" type="datetime1">
               <a:rPr lang="en-US" smtClean="0"/>
-              <a:t>2/9/2026</a:t>
+              <a:t>2/11/2026</a:t>
             </a:fld>
             <a:endParaRPr lang="en-US"/>
           </a:p>
@@ -8450,7 +8450,7 @@
           <a:p>
             <a:fld id="{109E55A0-C911-4F03-82FC-7E5926047D46}" type="datetime1">
               <a:rPr lang="en-US" smtClean="0"/>
-              <a:t>2/9/2026</a:t>
+              <a:t>2/11/2026</a:t>
             </a:fld>
             <a:endParaRPr lang="en-US"/>
           </a:p>
@@ -8763,7 +8763,7 @@
           <a:p>
             <a:fld id="{A533CBE2-D5BE-47AC-ADC2-9CDFC1D0CF90}" type="datetime1">
               <a:rPr lang="en-US" smtClean="0"/>
-              <a:t>2/9/2026</a:t>
+              <a:t>2/11/2026</a:t>
             </a:fld>
             <a:endParaRPr lang="en-US"/>
           </a:p>
@@ -9064,7 +9064,7 @@
           <a:p>
             <a:fld id="{39B7EDB1-CE74-4951-85A2-0B01C2128E28}" type="datetime1">
               <a:rPr lang="en-US" smtClean="0"/>
-              <a:t>2/9/2026</a:t>
+              <a:t>2/11/2026</a:t>
             </a:fld>
             <a:endParaRPr lang="en-US"/>
           </a:p>
@@ -9512,7 +9512,7 @@
           <a:p>
             <a:fld id="{2BC7EB92-A5C2-4807-A9DC-9EDE6CBFB241}" type="datetime1">
               <a:rPr lang="en-US" smtClean="0"/>
-              <a:t>2/9/2026</a:t>
+              <a:t>2/11/2026</a:t>
             </a:fld>
             <a:endParaRPr lang="en-US"/>
           </a:p>
@@ -9625,7 +9625,7 @@
           <a:p>
             <a:fld id="{2B7B7EE0-7771-4CD5-9B2B-3550753A54A1}" type="datetime1">
               <a:rPr lang="en-US" smtClean="0"/>
-              <a:t>2/9/2026</a:t>
+              <a:t>2/11/2026</a:t>
             </a:fld>
             <a:endParaRPr lang="en-US"/>
           </a:p>
@@ -9936,7 +9936,7 @@
           <a:p>
             <a:fld id="{F8B318B3-0E87-4416-A9B8-D891968C2727}" type="datetime1">
               <a:rPr lang="en-US" smtClean="0"/>
-              <a:t>2/9/2026</a:t>
+              <a:t>2/11/2026</a:t>
             </a:fld>
             <a:endParaRPr lang="en-US"/>
           </a:p>
@@ -10177,7 +10177,7 @@
           <a:p>
             <a:fld id="{54D997E8-DDEE-43F1-8D9B-F8A1E11DE488}" type="datetime1">
               <a:rPr lang="en-US" smtClean="0"/>
-              <a:t>2/9/2026</a:t>
+              <a:t>2/11/2026</a:t>
             </a:fld>
             <a:endParaRPr lang="en-US"/>
           </a:p>
@@ -10681,7 +10681,7 @@
             </a:pPr>
             <a:r>
               <a:rPr lang="en-US" sz="2400" dirty="0"/>
-              <a:t>Adeel Bhutta, Mitch Wand, and Rob Simmons</a:t>
+              <a:t>Adeel Bhutta, Rob Simmons, and Mitch Wand</a:t>
             </a:r>
           </a:p>
           <a:p>
@@ -10758,20 +10758,12 @@
           <a:lstStyle/>
           <a:p>
             <a:r>
-              <a:rPr lang="en-US">
+              <a:rPr lang="en-US" dirty="0">
                 <a:solidFill>
                   <a:srgbClr val="5C5962"/>
                 </a:solidFill>
               </a:rPr>
-              <a:t>© 2025 </a:t>
-            </a:r>
-            <a:r>
-              <a:rPr lang="en-US" dirty="0">
-                <a:solidFill>
-                  <a:srgbClr val="5C5962"/>
-                </a:solidFill>
-              </a:rPr>
-              <a:t>Released under the </a:t>
+              <a:t>© 2026 Released under the </a:t>
             </a:r>
             <a:r>
               <a:rPr lang="en-US" dirty="0">
